--- a/public/videos/repositories/restaurant-seat-alert/restaurant-seat-alert-tech-preview.pptx
+++ b/public/videos/repositories/restaurant-seat-alert/restaurant-seat-alert-tech-preview.pptx
@@ -134,7 +134,7 @@
           <p:cNvPr id="2" name="タイトル 1">
             <a:extLst>
               <a:ext uri="{FF2B5EF4-FFF2-40B4-BE49-F238E27FC236}">
-                <a16:creationId xmlns:a16="http://schemas.microsoft.com/office/drawing/2014/main" id="{BDB00415-8862-5E8D-F1AA-BCB7599108CC}"/>
+                <a16:creationId xmlns:a16="http://schemas.microsoft.com/office/drawing/2014/main" id="{DEDFAB3B-27F7-20AA-DFE1-5D991C134C19}"/>
               </a:ext>
             </a:extLst>
           </p:cNvPr>
@@ -171,7 +171,7 @@
           <p:cNvPr id="3" name="字幕 2">
             <a:extLst>
               <a:ext uri="{FF2B5EF4-FFF2-40B4-BE49-F238E27FC236}">
-                <a16:creationId xmlns:a16="http://schemas.microsoft.com/office/drawing/2014/main" id="{44CBAC9F-0CCF-F1D2-471C-7CA25E559945}"/>
+                <a16:creationId xmlns:a16="http://schemas.microsoft.com/office/drawing/2014/main" id="{4C9D5D6A-54CB-F94C-3930-E8C046ED0D5A}"/>
               </a:ext>
             </a:extLst>
           </p:cNvPr>
@@ -241,7 +241,7 @@
           <p:cNvPr id="4" name="日付プレースホルダー 3">
             <a:extLst>
               <a:ext uri="{FF2B5EF4-FFF2-40B4-BE49-F238E27FC236}">
-                <a16:creationId xmlns:a16="http://schemas.microsoft.com/office/drawing/2014/main" id="{B9C0B593-7904-D484-5C96-FC9243DFEA6E}"/>
+                <a16:creationId xmlns:a16="http://schemas.microsoft.com/office/drawing/2014/main" id="{9BAF6993-4AEB-EA5B-28D9-5A47330A42F2}"/>
               </a:ext>
             </a:extLst>
           </p:cNvPr>
@@ -257,7 +257,7 @@
           <a:bodyPr/>
           <a:lstStyle/>
           <a:p>
-            <a:fld id="{57E94288-5A2C-4424-92F2-F08D9038A8E6}" type="datetimeFigureOut">
+            <a:fld id="{2F2641F0-B500-4271-B2FC-7B235583C74F}" type="datetimeFigureOut">
               <a:rPr kumimoji="1" lang="ja-JP" altLang="en-US" smtClean="0"/>
               <a:t>2026/7/30</a:t>
             </a:fld>
@@ -270,7 +270,7 @@
           <p:cNvPr id="5" name="フッター プレースホルダー 4">
             <a:extLst>
               <a:ext uri="{FF2B5EF4-FFF2-40B4-BE49-F238E27FC236}">
-                <a16:creationId xmlns:a16="http://schemas.microsoft.com/office/drawing/2014/main" id="{37A50261-EB6A-72CB-FD57-20C394357CB6}"/>
+                <a16:creationId xmlns:a16="http://schemas.microsoft.com/office/drawing/2014/main" id="{F2F955A4-C154-0DC3-0825-B167DB36444A}"/>
               </a:ext>
             </a:extLst>
           </p:cNvPr>
@@ -295,7 +295,7 @@
           <p:cNvPr id="6" name="スライド番号プレースホルダー 5">
             <a:extLst>
               <a:ext uri="{FF2B5EF4-FFF2-40B4-BE49-F238E27FC236}">
-                <a16:creationId xmlns:a16="http://schemas.microsoft.com/office/drawing/2014/main" id="{1A58643D-8935-848A-6BE0-2904CC182DD3}"/>
+                <a16:creationId xmlns:a16="http://schemas.microsoft.com/office/drawing/2014/main" id="{DF06EE8F-00F0-6668-895C-CB59F75C69BD}"/>
               </a:ext>
             </a:extLst>
           </p:cNvPr>
@@ -311,7 +311,7 @@
           <a:bodyPr/>
           <a:lstStyle/>
           <a:p>
-            <a:fld id="{74E78F43-7BF4-49A2-96E2-D5704E76B6BA}" type="slidenum">
+            <a:fld id="{32B30BAA-96DF-405C-BB73-EF05DC564CD5}" type="slidenum">
               <a:rPr kumimoji="1" lang="ja-JP" altLang="en-US" smtClean="0"/>
               <a:t>‹#›</a:t>
             </a:fld>
@@ -322,7 +322,7 @@
     </p:spTree>
     <p:extLst>
       <p:ext uri="{BB962C8B-B14F-4D97-AF65-F5344CB8AC3E}">
-        <p14:creationId xmlns:p14="http://schemas.microsoft.com/office/powerpoint/2010/main" val="3686851161"/>
+        <p14:creationId xmlns:p14="http://schemas.microsoft.com/office/powerpoint/2010/main" val="2959975711"/>
       </p:ext>
     </p:extLst>
   </p:cSld>
@@ -354,7 +354,7 @@
           <p:cNvPr id="2" name="タイトル 1">
             <a:extLst>
               <a:ext uri="{FF2B5EF4-FFF2-40B4-BE49-F238E27FC236}">
-                <a16:creationId xmlns:a16="http://schemas.microsoft.com/office/drawing/2014/main" id="{D63CD985-50E5-EA87-358B-53F7B9C2A43B}"/>
+                <a16:creationId xmlns:a16="http://schemas.microsoft.com/office/drawing/2014/main" id="{A1B00CC5-3FF8-CE70-8AB4-D2F1154A320A}"/>
               </a:ext>
             </a:extLst>
           </p:cNvPr>
@@ -382,7 +382,7 @@
           <p:cNvPr id="3" name="縦書きテキスト プレースホルダー 2">
             <a:extLst>
               <a:ext uri="{FF2B5EF4-FFF2-40B4-BE49-F238E27FC236}">
-                <a16:creationId xmlns:a16="http://schemas.microsoft.com/office/drawing/2014/main" id="{36D00A4C-4A19-33A9-CB15-A00A7581D1A8}"/>
+                <a16:creationId xmlns:a16="http://schemas.microsoft.com/office/drawing/2014/main" id="{1AA77042-0DEE-1AE9-0D8F-B82D95C538CD}"/>
               </a:ext>
             </a:extLst>
           </p:cNvPr>
@@ -471,7 +471,7 @@
           <p:cNvPr id="4" name="日付プレースホルダー 3">
             <a:extLst>
               <a:ext uri="{FF2B5EF4-FFF2-40B4-BE49-F238E27FC236}">
-                <a16:creationId xmlns:a16="http://schemas.microsoft.com/office/drawing/2014/main" id="{EF471AB1-0581-5A3F-9179-4150065F0206}"/>
+                <a16:creationId xmlns:a16="http://schemas.microsoft.com/office/drawing/2014/main" id="{775457A8-9869-7408-78C0-0ACC0079B9F1}"/>
               </a:ext>
             </a:extLst>
           </p:cNvPr>
@@ -487,7 +487,7 @@
           <a:bodyPr/>
           <a:lstStyle/>
           <a:p>
-            <a:fld id="{57E94288-5A2C-4424-92F2-F08D9038A8E6}" type="datetimeFigureOut">
+            <a:fld id="{2F2641F0-B500-4271-B2FC-7B235583C74F}" type="datetimeFigureOut">
               <a:rPr kumimoji="1" lang="ja-JP" altLang="en-US" smtClean="0"/>
               <a:t>2026/7/30</a:t>
             </a:fld>
@@ -500,7 +500,7 @@
           <p:cNvPr id="5" name="フッター プレースホルダー 4">
             <a:extLst>
               <a:ext uri="{FF2B5EF4-FFF2-40B4-BE49-F238E27FC236}">
-                <a16:creationId xmlns:a16="http://schemas.microsoft.com/office/drawing/2014/main" id="{D702851C-BFF1-915D-B3E6-4C0DDEB31682}"/>
+                <a16:creationId xmlns:a16="http://schemas.microsoft.com/office/drawing/2014/main" id="{EBB6E833-B6CB-5F5A-A90E-3B7E1B2CAD3E}"/>
               </a:ext>
             </a:extLst>
           </p:cNvPr>
@@ -525,7 +525,7 @@
           <p:cNvPr id="6" name="スライド番号プレースホルダー 5">
             <a:extLst>
               <a:ext uri="{FF2B5EF4-FFF2-40B4-BE49-F238E27FC236}">
-                <a16:creationId xmlns:a16="http://schemas.microsoft.com/office/drawing/2014/main" id="{7AA5E390-65F3-6DFB-A631-AA90CD50AB0E}"/>
+                <a16:creationId xmlns:a16="http://schemas.microsoft.com/office/drawing/2014/main" id="{203057D5-37A6-7D48-453A-226172EECA35}"/>
               </a:ext>
             </a:extLst>
           </p:cNvPr>
@@ -541,7 +541,7 @@
           <a:bodyPr/>
           <a:lstStyle/>
           <a:p>
-            <a:fld id="{74E78F43-7BF4-49A2-96E2-D5704E76B6BA}" type="slidenum">
+            <a:fld id="{32B30BAA-96DF-405C-BB73-EF05DC564CD5}" type="slidenum">
               <a:rPr kumimoji="1" lang="ja-JP" altLang="en-US" smtClean="0"/>
               <a:t>‹#›</a:t>
             </a:fld>
@@ -552,7 +552,7 @@
     </p:spTree>
     <p:extLst>
       <p:ext uri="{BB962C8B-B14F-4D97-AF65-F5344CB8AC3E}">
-        <p14:creationId xmlns:p14="http://schemas.microsoft.com/office/powerpoint/2010/main" val="2073408192"/>
+        <p14:creationId xmlns:p14="http://schemas.microsoft.com/office/powerpoint/2010/main" val="3649106934"/>
       </p:ext>
     </p:extLst>
   </p:cSld>
@@ -584,7 +584,7 @@
           <p:cNvPr id="2" name="縦書きタイトル 1">
             <a:extLst>
               <a:ext uri="{FF2B5EF4-FFF2-40B4-BE49-F238E27FC236}">
-                <a16:creationId xmlns:a16="http://schemas.microsoft.com/office/drawing/2014/main" id="{81CC4078-3C3E-4180-2B9B-8E18B0FA5BE2}"/>
+                <a16:creationId xmlns:a16="http://schemas.microsoft.com/office/drawing/2014/main" id="{F654AAD1-C62F-E68C-F782-B8CEB6A04A8C}"/>
               </a:ext>
             </a:extLst>
           </p:cNvPr>
@@ -617,7 +617,7 @@
           <p:cNvPr id="3" name="縦書きテキスト プレースホルダー 2">
             <a:extLst>
               <a:ext uri="{FF2B5EF4-FFF2-40B4-BE49-F238E27FC236}">
-                <a16:creationId xmlns:a16="http://schemas.microsoft.com/office/drawing/2014/main" id="{6C06682D-D0E5-3A36-2C7A-078CC6CF4A6C}"/>
+                <a16:creationId xmlns:a16="http://schemas.microsoft.com/office/drawing/2014/main" id="{316197EE-D189-8E78-AD99-075397636901}"/>
               </a:ext>
             </a:extLst>
           </p:cNvPr>
@@ -711,7 +711,7 @@
           <p:cNvPr id="4" name="日付プレースホルダー 3">
             <a:extLst>
               <a:ext uri="{FF2B5EF4-FFF2-40B4-BE49-F238E27FC236}">
-                <a16:creationId xmlns:a16="http://schemas.microsoft.com/office/drawing/2014/main" id="{852AD412-BFA2-6F12-F06B-269F82C3D7BE}"/>
+                <a16:creationId xmlns:a16="http://schemas.microsoft.com/office/drawing/2014/main" id="{858FDC14-D54C-C1DA-0575-1998FF5A4FA2}"/>
               </a:ext>
             </a:extLst>
           </p:cNvPr>
@@ -727,7 +727,7 @@
           <a:bodyPr/>
           <a:lstStyle/>
           <a:p>
-            <a:fld id="{57E94288-5A2C-4424-92F2-F08D9038A8E6}" type="datetimeFigureOut">
+            <a:fld id="{2F2641F0-B500-4271-B2FC-7B235583C74F}" type="datetimeFigureOut">
               <a:rPr kumimoji="1" lang="ja-JP" altLang="en-US" smtClean="0"/>
               <a:t>2026/7/30</a:t>
             </a:fld>
@@ -740,7 +740,7 @@
           <p:cNvPr id="5" name="フッター プレースホルダー 4">
             <a:extLst>
               <a:ext uri="{FF2B5EF4-FFF2-40B4-BE49-F238E27FC236}">
-                <a16:creationId xmlns:a16="http://schemas.microsoft.com/office/drawing/2014/main" id="{1FFB2CA1-35C1-B2D7-7D43-274B177EADB4}"/>
+                <a16:creationId xmlns:a16="http://schemas.microsoft.com/office/drawing/2014/main" id="{460F04A2-6358-3857-ECAD-A720DD399CCD}"/>
               </a:ext>
             </a:extLst>
           </p:cNvPr>
@@ -765,7 +765,7 @@
           <p:cNvPr id="6" name="スライド番号プレースホルダー 5">
             <a:extLst>
               <a:ext uri="{FF2B5EF4-FFF2-40B4-BE49-F238E27FC236}">
-                <a16:creationId xmlns:a16="http://schemas.microsoft.com/office/drawing/2014/main" id="{91490C80-F499-34D9-9382-FD6A571525C6}"/>
+                <a16:creationId xmlns:a16="http://schemas.microsoft.com/office/drawing/2014/main" id="{96A9BFFC-628D-0448-BF21-0F11F11F8062}"/>
               </a:ext>
             </a:extLst>
           </p:cNvPr>
@@ -781,7 +781,7 @@
           <a:bodyPr/>
           <a:lstStyle/>
           <a:p>
-            <a:fld id="{74E78F43-7BF4-49A2-96E2-D5704E76B6BA}" type="slidenum">
+            <a:fld id="{32B30BAA-96DF-405C-BB73-EF05DC564CD5}" type="slidenum">
               <a:rPr kumimoji="1" lang="ja-JP" altLang="en-US" smtClean="0"/>
               <a:t>‹#›</a:t>
             </a:fld>
@@ -792,7 +792,7 @@
     </p:spTree>
     <p:extLst>
       <p:ext uri="{BB962C8B-B14F-4D97-AF65-F5344CB8AC3E}">
-        <p14:creationId xmlns:p14="http://schemas.microsoft.com/office/powerpoint/2010/main" val="2441999128"/>
+        <p14:creationId xmlns:p14="http://schemas.microsoft.com/office/powerpoint/2010/main" val="1723927873"/>
       </p:ext>
     </p:extLst>
   </p:cSld>
@@ -824,7 +824,7 @@
           <p:cNvPr id="2" name="タイトル 1">
             <a:extLst>
               <a:ext uri="{FF2B5EF4-FFF2-40B4-BE49-F238E27FC236}">
-                <a16:creationId xmlns:a16="http://schemas.microsoft.com/office/drawing/2014/main" id="{318FC6ED-D323-75CF-1FC4-E29772084A20}"/>
+                <a16:creationId xmlns:a16="http://schemas.microsoft.com/office/drawing/2014/main" id="{D706E6E9-6817-68BB-466A-62853D45FE8A}"/>
               </a:ext>
             </a:extLst>
           </p:cNvPr>
@@ -852,7 +852,7 @@
           <p:cNvPr id="3" name="コンテンツ プレースホルダー 2">
             <a:extLst>
               <a:ext uri="{FF2B5EF4-FFF2-40B4-BE49-F238E27FC236}">
-                <a16:creationId xmlns:a16="http://schemas.microsoft.com/office/drawing/2014/main" id="{66F1C0D1-FA88-AF36-3C48-42D75860B463}"/>
+                <a16:creationId xmlns:a16="http://schemas.microsoft.com/office/drawing/2014/main" id="{87250C86-788F-6960-30C5-258F28A13130}"/>
               </a:ext>
             </a:extLst>
           </p:cNvPr>
@@ -941,7 +941,7 @@
           <p:cNvPr id="4" name="日付プレースホルダー 3">
             <a:extLst>
               <a:ext uri="{FF2B5EF4-FFF2-40B4-BE49-F238E27FC236}">
-                <a16:creationId xmlns:a16="http://schemas.microsoft.com/office/drawing/2014/main" id="{4CD5D62A-5F2F-F7A7-7485-0B997B2F5BDE}"/>
+                <a16:creationId xmlns:a16="http://schemas.microsoft.com/office/drawing/2014/main" id="{0C7FDA60-C475-D5CA-AFC0-17BE7FA2A98D}"/>
               </a:ext>
             </a:extLst>
           </p:cNvPr>
@@ -957,7 +957,7 @@
           <a:bodyPr/>
           <a:lstStyle/>
           <a:p>
-            <a:fld id="{57E94288-5A2C-4424-92F2-F08D9038A8E6}" type="datetimeFigureOut">
+            <a:fld id="{2F2641F0-B500-4271-B2FC-7B235583C74F}" type="datetimeFigureOut">
               <a:rPr kumimoji="1" lang="ja-JP" altLang="en-US" smtClean="0"/>
               <a:t>2026/7/30</a:t>
             </a:fld>
@@ -970,7 +970,7 @@
           <p:cNvPr id="5" name="フッター プレースホルダー 4">
             <a:extLst>
               <a:ext uri="{FF2B5EF4-FFF2-40B4-BE49-F238E27FC236}">
-                <a16:creationId xmlns:a16="http://schemas.microsoft.com/office/drawing/2014/main" id="{0D8C264A-025C-AF52-5945-97E35D4779CE}"/>
+                <a16:creationId xmlns:a16="http://schemas.microsoft.com/office/drawing/2014/main" id="{820D7F10-9B6B-BA7E-A066-47E437C98DE8}"/>
               </a:ext>
             </a:extLst>
           </p:cNvPr>
@@ -995,7 +995,7 @@
           <p:cNvPr id="6" name="スライド番号プレースホルダー 5">
             <a:extLst>
               <a:ext uri="{FF2B5EF4-FFF2-40B4-BE49-F238E27FC236}">
-                <a16:creationId xmlns:a16="http://schemas.microsoft.com/office/drawing/2014/main" id="{A49D3D8C-B301-0B09-82D6-B9828A3283F7}"/>
+                <a16:creationId xmlns:a16="http://schemas.microsoft.com/office/drawing/2014/main" id="{B848A44C-2499-76A4-720F-BA37732F8E10}"/>
               </a:ext>
             </a:extLst>
           </p:cNvPr>
@@ -1011,7 +1011,7 @@
           <a:bodyPr/>
           <a:lstStyle/>
           <a:p>
-            <a:fld id="{74E78F43-7BF4-49A2-96E2-D5704E76B6BA}" type="slidenum">
+            <a:fld id="{32B30BAA-96DF-405C-BB73-EF05DC564CD5}" type="slidenum">
               <a:rPr kumimoji="1" lang="ja-JP" altLang="en-US" smtClean="0"/>
               <a:t>‹#›</a:t>
             </a:fld>
@@ -1022,7 +1022,7 @@
     </p:spTree>
     <p:extLst>
       <p:ext uri="{BB962C8B-B14F-4D97-AF65-F5344CB8AC3E}">
-        <p14:creationId xmlns:p14="http://schemas.microsoft.com/office/powerpoint/2010/main" val="2757087983"/>
+        <p14:creationId xmlns:p14="http://schemas.microsoft.com/office/powerpoint/2010/main" val="4142228189"/>
       </p:ext>
     </p:extLst>
   </p:cSld>
@@ -1054,7 +1054,7 @@
           <p:cNvPr id="2" name="タイトル 1">
             <a:extLst>
               <a:ext uri="{FF2B5EF4-FFF2-40B4-BE49-F238E27FC236}">
-                <a16:creationId xmlns:a16="http://schemas.microsoft.com/office/drawing/2014/main" id="{335D6648-01B9-6127-55FB-C243ED1219B5}"/>
+                <a16:creationId xmlns:a16="http://schemas.microsoft.com/office/drawing/2014/main" id="{BE9A843A-A4F9-1E32-9390-11A0B6CF34FD}"/>
               </a:ext>
             </a:extLst>
           </p:cNvPr>
@@ -1091,7 +1091,7 @@
           <p:cNvPr id="3" name="テキスト プレースホルダー 2">
             <a:extLst>
               <a:ext uri="{FF2B5EF4-FFF2-40B4-BE49-F238E27FC236}">
-                <a16:creationId xmlns:a16="http://schemas.microsoft.com/office/drawing/2014/main" id="{F09CDD9F-B58E-4263-E577-D88FBF0A3F33}"/>
+                <a16:creationId xmlns:a16="http://schemas.microsoft.com/office/drawing/2014/main" id="{43380206-B9B5-C075-7544-1E7152582959}"/>
               </a:ext>
             </a:extLst>
           </p:cNvPr>
@@ -1216,7 +1216,7 @@
           <p:cNvPr id="4" name="日付プレースホルダー 3">
             <a:extLst>
               <a:ext uri="{FF2B5EF4-FFF2-40B4-BE49-F238E27FC236}">
-                <a16:creationId xmlns:a16="http://schemas.microsoft.com/office/drawing/2014/main" id="{949FBCD0-CBE6-4797-CEAA-3EFCA18907D5}"/>
+                <a16:creationId xmlns:a16="http://schemas.microsoft.com/office/drawing/2014/main" id="{300DE85E-09F1-4966-9601-233D6F8D9686}"/>
               </a:ext>
             </a:extLst>
           </p:cNvPr>
@@ -1232,7 +1232,7 @@
           <a:bodyPr/>
           <a:lstStyle/>
           <a:p>
-            <a:fld id="{57E94288-5A2C-4424-92F2-F08D9038A8E6}" type="datetimeFigureOut">
+            <a:fld id="{2F2641F0-B500-4271-B2FC-7B235583C74F}" type="datetimeFigureOut">
               <a:rPr kumimoji="1" lang="ja-JP" altLang="en-US" smtClean="0"/>
               <a:t>2026/7/30</a:t>
             </a:fld>
@@ -1245,7 +1245,7 @@
           <p:cNvPr id="5" name="フッター プレースホルダー 4">
             <a:extLst>
               <a:ext uri="{FF2B5EF4-FFF2-40B4-BE49-F238E27FC236}">
-                <a16:creationId xmlns:a16="http://schemas.microsoft.com/office/drawing/2014/main" id="{1497A315-629C-1F5D-46A6-141440B55234}"/>
+                <a16:creationId xmlns:a16="http://schemas.microsoft.com/office/drawing/2014/main" id="{B3F7A6EE-0B06-2CAA-210A-9B7F1A8B24EC}"/>
               </a:ext>
             </a:extLst>
           </p:cNvPr>
@@ -1270,7 +1270,7 @@
           <p:cNvPr id="6" name="スライド番号プレースホルダー 5">
             <a:extLst>
               <a:ext uri="{FF2B5EF4-FFF2-40B4-BE49-F238E27FC236}">
-                <a16:creationId xmlns:a16="http://schemas.microsoft.com/office/drawing/2014/main" id="{B226668D-CC19-F025-383E-68E376FE9A37}"/>
+                <a16:creationId xmlns:a16="http://schemas.microsoft.com/office/drawing/2014/main" id="{1B5413EC-3E8E-4BE9-8EB9-66B3214AA03A}"/>
               </a:ext>
             </a:extLst>
           </p:cNvPr>
@@ -1286,7 +1286,7 @@
           <a:bodyPr/>
           <a:lstStyle/>
           <a:p>
-            <a:fld id="{74E78F43-7BF4-49A2-96E2-D5704E76B6BA}" type="slidenum">
+            <a:fld id="{32B30BAA-96DF-405C-BB73-EF05DC564CD5}" type="slidenum">
               <a:rPr kumimoji="1" lang="ja-JP" altLang="en-US" smtClean="0"/>
               <a:t>‹#›</a:t>
             </a:fld>
@@ -1297,7 +1297,7 @@
     </p:spTree>
     <p:extLst>
       <p:ext uri="{BB962C8B-B14F-4D97-AF65-F5344CB8AC3E}">
-        <p14:creationId xmlns:p14="http://schemas.microsoft.com/office/powerpoint/2010/main" val="788725840"/>
+        <p14:creationId xmlns:p14="http://schemas.microsoft.com/office/powerpoint/2010/main" val="723407906"/>
       </p:ext>
     </p:extLst>
   </p:cSld>
@@ -1329,7 +1329,7 @@
           <p:cNvPr id="2" name="タイトル 1">
             <a:extLst>
               <a:ext uri="{FF2B5EF4-FFF2-40B4-BE49-F238E27FC236}">
-                <a16:creationId xmlns:a16="http://schemas.microsoft.com/office/drawing/2014/main" id="{CB6C1F37-402C-5A5E-7F2F-9B7298BAB4EE}"/>
+                <a16:creationId xmlns:a16="http://schemas.microsoft.com/office/drawing/2014/main" id="{403C7560-FA7A-7F00-6BF5-1D85DD2BC990}"/>
               </a:ext>
             </a:extLst>
           </p:cNvPr>
@@ -1357,7 +1357,7 @@
           <p:cNvPr id="3" name="コンテンツ プレースホルダー 2">
             <a:extLst>
               <a:ext uri="{FF2B5EF4-FFF2-40B4-BE49-F238E27FC236}">
-                <a16:creationId xmlns:a16="http://schemas.microsoft.com/office/drawing/2014/main" id="{4BD4B682-BE37-85DE-8E64-6776CA83EA16}"/>
+                <a16:creationId xmlns:a16="http://schemas.microsoft.com/office/drawing/2014/main" id="{A7FD475A-A0FD-8827-B3C5-84CD8E668E16}"/>
               </a:ext>
             </a:extLst>
           </p:cNvPr>
@@ -1451,7 +1451,7 @@
           <p:cNvPr id="4" name="コンテンツ プレースホルダー 3">
             <a:extLst>
               <a:ext uri="{FF2B5EF4-FFF2-40B4-BE49-F238E27FC236}">
-                <a16:creationId xmlns:a16="http://schemas.microsoft.com/office/drawing/2014/main" id="{B31FF989-D52E-F3AE-02A9-6BC3BBCA1FA2}"/>
+                <a16:creationId xmlns:a16="http://schemas.microsoft.com/office/drawing/2014/main" id="{C3CEBF8D-C15F-9A25-D776-9A0D0DCE9E09}"/>
               </a:ext>
             </a:extLst>
           </p:cNvPr>
@@ -1545,7 +1545,7 @@
           <p:cNvPr id="5" name="日付プレースホルダー 4">
             <a:extLst>
               <a:ext uri="{FF2B5EF4-FFF2-40B4-BE49-F238E27FC236}">
-                <a16:creationId xmlns:a16="http://schemas.microsoft.com/office/drawing/2014/main" id="{C6327D46-6EEA-2EA4-4476-29A2F98D885E}"/>
+                <a16:creationId xmlns:a16="http://schemas.microsoft.com/office/drawing/2014/main" id="{D818D86F-6162-00DE-5E45-4CF2A55FDD95}"/>
               </a:ext>
             </a:extLst>
           </p:cNvPr>
@@ -1561,7 +1561,7 @@
           <a:bodyPr/>
           <a:lstStyle/>
           <a:p>
-            <a:fld id="{57E94288-5A2C-4424-92F2-F08D9038A8E6}" type="datetimeFigureOut">
+            <a:fld id="{2F2641F0-B500-4271-B2FC-7B235583C74F}" type="datetimeFigureOut">
               <a:rPr kumimoji="1" lang="ja-JP" altLang="en-US" smtClean="0"/>
               <a:t>2026/7/30</a:t>
             </a:fld>
@@ -1574,7 +1574,7 @@
           <p:cNvPr id="6" name="フッター プレースホルダー 5">
             <a:extLst>
               <a:ext uri="{FF2B5EF4-FFF2-40B4-BE49-F238E27FC236}">
-                <a16:creationId xmlns:a16="http://schemas.microsoft.com/office/drawing/2014/main" id="{68E44BB5-CF70-724F-38A1-4CE3B19817CA}"/>
+                <a16:creationId xmlns:a16="http://schemas.microsoft.com/office/drawing/2014/main" id="{6C7899E1-15FC-BD9D-FCC2-8D8036543CA0}"/>
               </a:ext>
             </a:extLst>
           </p:cNvPr>
@@ -1599,7 +1599,7 @@
           <p:cNvPr id="7" name="スライド番号プレースホルダー 6">
             <a:extLst>
               <a:ext uri="{FF2B5EF4-FFF2-40B4-BE49-F238E27FC236}">
-                <a16:creationId xmlns:a16="http://schemas.microsoft.com/office/drawing/2014/main" id="{13054BFE-0950-3D82-7AF4-618345FF0E89}"/>
+                <a16:creationId xmlns:a16="http://schemas.microsoft.com/office/drawing/2014/main" id="{611EB3A8-85F3-BE59-5730-0AC47349D4C9}"/>
               </a:ext>
             </a:extLst>
           </p:cNvPr>
@@ -1615,7 +1615,7 @@
           <a:bodyPr/>
           <a:lstStyle/>
           <a:p>
-            <a:fld id="{74E78F43-7BF4-49A2-96E2-D5704E76B6BA}" type="slidenum">
+            <a:fld id="{32B30BAA-96DF-405C-BB73-EF05DC564CD5}" type="slidenum">
               <a:rPr kumimoji="1" lang="ja-JP" altLang="en-US" smtClean="0"/>
               <a:t>‹#›</a:t>
             </a:fld>
@@ -1626,7 +1626,7 @@
     </p:spTree>
     <p:extLst>
       <p:ext uri="{BB962C8B-B14F-4D97-AF65-F5344CB8AC3E}">
-        <p14:creationId xmlns:p14="http://schemas.microsoft.com/office/powerpoint/2010/main" val="1087180430"/>
+        <p14:creationId xmlns:p14="http://schemas.microsoft.com/office/powerpoint/2010/main" val="432842662"/>
       </p:ext>
     </p:extLst>
   </p:cSld>
@@ -1658,7 +1658,7 @@
           <p:cNvPr id="2" name="タイトル 1">
             <a:extLst>
               <a:ext uri="{FF2B5EF4-FFF2-40B4-BE49-F238E27FC236}">
-                <a16:creationId xmlns:a16="http://schemas.microsoft.com/office/drawing/2014/main" id="{85D21B2C-7233-2F83-A0D4-C15C4C9294D1}"/>
+                <a16:creationId xmlns:a16="http://schemas.microsoft.com/office/drawing/2014/main" id="{D7E1339B-FD78-A3D8-4BC8-1606B8F10984}"/>
               </a:ext>
             </a:extLst>
           </p:cNvPr>
@@ -1691,7 +1691,7 @@
           <p:cNvPr id="3" name="テキスト プレースホルダー 2">
             <a:extLst>
               <a:ext uri="{FF2B5EF4-FFF2-40B4-BE49-F238E27FC236}">
-                <a16:creationId xmlns:a16="http://schemas.microsoft.com/office/drawing/2014/main" id="{82A8DA0E-C6F2-EC31-19EC-EA7E03DEA671}"/>
+                <a16:creationId xmlns:a16="http://schemas.microsoft.com/office/drawing/2014/main" id="{F99A300B-3D2F-640B-A5A8-1C1B88FF6FE9}"/>
               </a:ext>
             </a:extLst>
           </p:cNvPr>
@@ -1762,7 +1762,7 @@
           <p:cNvPr id="4" name="コンテンツ プレースホルダー 3">
             <a:extLst>
               <a:ext uri="{FF2B5EF4-FFF2-40B4-BE49-F238E27FC236}">
-                <a16:creationId xmlns:a16="http://schemas.microsoft.com/office/drawing/2014/main" id="{2244D4BD-10EF-9461-A43D-F19B2174F724}"/>
+                <a16:creationId xmlns:a16="http://schemas.microsoft.com/office/drawing/2014/main" id="{EE516BCB-8AA0-EB04-CEFF-94C112785B7C}"/>
               </a:ext>
             </a:extLst>
           </p:cNvPr>
@@ -1856,7 +1856,7 @@
           <p:cNvPr id="5" name="テキスト プレースホルダー 4">
             <a:extLst>
               <a:ext uri="{FF2B5EF4-FFF2-40B4-BE49-F238E27FC236}">
-                <a16:creationId xmlns:a16="http://schemas.microsoft.com/office/drawing/2014/main" id="{5BCE6B45-FF1B-D299-967E-FD6AB760E22A}"/>
+                <a16:creationId xmlns:a16="http://schemas.microsoft.com/office/drawing/2014/main" id="{26764C52-2B30-5FC5-A3D8-BD1ABC395694}"/>
               </a:ext>
             </a:extLst>
           </p:cNvPr>
@@ -1927,7 +1927,7 @@
           <p:cNvPr id="6" name="コンテンツ プレースホルダー 5">
             <a:extLst>
               <a:ext uri="{FF2B5EF4-FFF2-40B4-BE49-F238E27FC236}">
-                <a16:creationId xmlns:a16="http://schemas.microsoft.com/office/drawing/2014/main" id="{CD4DB36B-7D73-9B64-056F-2438F8E05819}"/>
+                <a16:creationId xmlns:a16="http://schemas.microsoft.com/office/drawing/2014/main" id="{D0A87BF6-B7BD-BA06-C911-A80B3B55100A}"/>
               </a:ext>
             </a:extLst>
           </p:cNvPr>
@@ -2021,7 +2021,7 @@
           <p:cNvPr id="7" name="日付プレースホルダー 6">
             <a:extLst>
               <a:ext uri="{FF2B5EF4-FFF2-40B4-BE49-F238E27FC236}">
-                <a16:creationId xmlns:a16="http://schemas.microsoft.com/office/drawing/2014/main" id="{E562432F-309D-B77A-0543-34887D929C87}"/>
+                <a16:creationId xmlns:a16="http://schemas.microsoft.com/office/drawing/2014/main" id="{BE3C7E90-6A2A-9E86-1D1E-F51F6EB8F314}"/>
               </a:ext>
             </a:extLst>
           </p:cNvPr>
@@ -2037,7 +2037,7 @@
           <a:bodyPr/>
           <a:lstStyle/>
           <a:p>
-            <a:fld id="{57E94288-5A2C-4424-92F2-F08D9038A8E6}" type="datetimeFigureOut">
+            <a:fld id="{2F2641F0-B500-4271-B2FC-7B235583C74F}" type="datetimeFigureOut">
               <a:rPr kumimoji="1" lang="ja-JP" altLang="en-US" smtClean="0"/>
               <a:t>2026/7/30</a:t>
             </a:fld>
@@ -2050,7 +2050,7 @@
           <p:cNvPr id="8" name="フッター プレースホルダー 7">
             <a:extLst>
               <a:ext uri="{FF2B5EF4-FFF2-40B4-BE49-F238E27FC236}">
-                <a16:creationId xmlns:a16="http://schemas.microsoft.com/office/drawing/2014/main" id="{851D0BC0-D6F1-20F1-B9C9-6556179823B8}"/>
+                <a16:creationId xmlns:a16="http://schemas.microsoft.com/office/drawing/2014/main" id="{98F982AF-5376-272D-3F65-BFF3355E6662}"/>
               </a:ext>
             </a:extLst>
           </p:cNvPr>
@@ -2075,7 +2075,7 @@
           <p:cNvPr id="9" name="スライド番号プレースホルダー 8">
             <a:extLst>
               <a:ext uri="{FF2B5EF4-FFF2-40B4-BE49-F238E27FC236}">
-                <a16:creationId xmlns:a16="http://schemas.microsoft.com/office/drawing/2014/main" id="{38F64D33-068B-65E1-2465-768B043DB772}"/>
+                <a16:creationId xmlns:a16="http://schemas.microsoft.com/office/drawing/2014/main" id="{8BF5D506-28D8-F907-9345-EB6F58F8FC09}"/>
               </a:ext>
             </a:extLst>
           </p:cNvPr>
@@ -2091,7 +2091,7 @@
           <a:bodyPr/>
           <a:lstStyle/>
           <a:p>
-            <a:fld id="{74E78F43-7BF4-49A2-96E2-D5704E76B6BA}" type="slidenum">
+            <a:fld id="{32B30BAA-96DF-405C-BB73-EF05DC564CD5}" type="slidenum">
               <a:rPr kumimoji="1" lang="ja-JP" altLang="en-US" smtClean="0"/>
               <a:t>‹#›</a:t>
             </a:fld>
@@ -2102,7 +2102,7 @@
     </p:spTree>
     <p:extLst>
       <p:ext uri="{BB962C8B-B14F-4D97-AF65-F5344CB8AC3E}">
-        <p14:creationId xmlns:p14="http://schemas.microsoft.com/office/powerpoint/2010/main" val="2815336814"/>
+        <p14:creationId xmlns:p14="http://schemas.microsoft.com/office/powerpoint/2010/main" val="4071952250"/>
       </p:ext>
     </p:extLst>
   </p:cSld>
@@ -2134,7 +2134,7 @@
           <p:cNvPr id="2" name="タイトル 1">
             <a:extLst>
               <a:ext uri="{FF2B5EF4-FFF2-40B4-BE49-F238E27FC236}">
-                <a16:creationId xmlns:a16="http://schemas.microsoft.com/office/drawing/2014/main" id="{CC43C955-57F4-33F1-27E1-709C896F9656}"/>
+                <a16:creationId xmlns:a16="http://schemas.microsoft.com/office/drawing/2014/main" id="{2943A2BB-691F-70C7-AD94-9D91787D86BB}"/>
               </a:ext>
             </a:extLst>
           </p:cNvPr>
@@ -2162,7 +2162,7 @@
           <p:cNvPr id="3" name="日付プレースホルダー 2">
             <a:extLst>
               <a:ext uri="{FF2B5EF4-FFF2-40B4-BE49-F238E27FC236}">
-                <a16:creationId xmlns:a16="http://schemas.microsoft.com/office/drawing/2014/main" id="{1D7D35ED-0BA2-F35D-6B5A-5F36FFFF3B03}"/>
+                <a16:creationId xmlns:a16="http://schemas.microsoft.com/office/drawing/2014/main" id="{EF381600-9091-7805-4B9F-B96038D079AD}"/>
               </a:ext>
             </a:extLst>
           </p:cNvPr>
@@ -2178,7 +2178,7 @@
           <a:bodyPr/>
           <a:lstStyle/>
           <a:p>
-            <a:fld id="{57E94288-5A2C-4424-92F2-F08D9038A8E6}" type="datetimeFigureOut">
+            <a:fld id="{2F2641F0-B500-4271-B2FC-7B235583C74F}" type="datetimeFigureOut">
               <a:rPr kumimoji="1" lang="ja-JP" altLang="en-US" smtClean="0"/>
               <a:t>2026/7/30</a:t>
             </a:fld>
@@ -2191,7 +2191,7 @@
           <p:cNvPr id="4" name="フッター プレースホルダー 3">
             <a:extLst>
               <a:ext uri="{FF2B5EF4-FFF2-40B4-BE49-F238E27FC236}">
-                <a16:creationId xmlns:a16="http://schemas.microsoft.com/office/drawing/2014/main" id="{6225E8E6-C0FC-9930-8CEF-EB88AA931156}"/>
+                <a16:creationId xmlns:a16="http://schemas.microsoft.com/office/drawing/2014/main" id="{C461B71F-5476-6BAE-8F7F-9BBA43BE6775}"/>
               </a:ext>
             </a:extLst>
           </p:cNvPr>
@@ -2216,7 +2216,7 @@
           <p:cNvPr id="5" name="スライド番号プレースホルダー 4">
             <a:extLst>
               <a:ext uri="{FF2B5EF4-FFF2-40B4-BE49-F238E27FC236}">
-                <a16:creationId xmlns:a16="http://schemas.microsoft.com/office/drawing/2014/main" id="{4087C91C-745A-7CF8-D736-C1C5CFD4C481}"/>
+                <a16:creationId xmlns:a16="http://schemas.microsoft.com/office/drawing/2014/main" id="{73743397-9341-265F-92E6-C2CB5B7C0B10}"/>
               </a:ext>
             </a:extLst>
           </p:cNvPr>
@@ -2232,7 +2232,7 @@
           <a:bodyPr/>
           <a:lstStyle/>
           <a:p>
-            <a:fld id="{74E78F43-7BF4-49A2-96E2-D5704E76B6BA}" type="slidenum">
+            <a:fld id="{32B30BAA-96DF-405C-BB73-EF05DC564CD5}" type="slidenum">
               <a:rPr kumimoji="1" lang="ja-JP" altLang="en-US" smtClean="0"/>
               <a:t>‹#›</a:t>
             </a:fld>
@@ -2243,7 +2243,7 @@
     </p:spTree>
     <p:extLst>
       <p:ext uri="{BB962C8B-B14F-4D97-AF65-F5344CB8AC3E}">
-        <p14:creationId xmlns:p14="http://schemas.microsoft.com/office/powerpoint/2010/main" val="216091557"/>
+        <p14:creationId xmlns:p14="http://schemas.microsoft.com/office/powerpoint/2010/main" val="621550280"/>
       </p:ext>
     </p:extLst>
   </p:cSld>
@@ -2275,7 +2275,7 @@
           <p:cNvPr id="2" name="日付プレースホルダー 1">
             <a:extLst>
               <a:ext uri="{FF2B5EF4-FFF2-40B4-BE49-F238E27FC236}">
-                <a16:creationId xmlns:a16="http://schemas.microsoft.com/office/drawing/2014/main" id="{031C1B6D-EC71-2429-32E0-6CA26EBB74AF}"/>
+                <a16:creationId xmlns:a16="http://schemas.microsoft.com/office/drawing/2014/main" id="{7F4EBB56-331A-6AB2-A4C7-899207679232}"/>
               </a:ext>
             </a:extLst>
           </p:cNvPr>
@@ -2291,7 +2291,7 @@
           <a:bodyPr/>
           <a:lstStyle/>
           <a:p>
-            <a:fld id="{57E94288-5A2C-4424-92F2-F08D9038A8E6}" type="datetimeFigureOut">
+            <a:fld id="{2F2641F0-B500-4271-B2FC-7B235583C74F}" type="datetimeFigureOut">
               <a:rPr kumimoji="1" lang="ja-JP" altLang="en-US" smtClean="0"/>
               <a:t>2026/7/30</a:t>
             </a:fld>
@@ -2304,7 +2304,7 @@
           <p:cNvPr id="3" name="フッター プレースホルダー 2">
             <a:extLst>
               <a:ext uri="{FF2B5EF4-FFF2-40B4-BE49-F238E27FC236}">
-                <a16:creationId xmlns:a16="http://schemas.microsoft.com/office/drawing/2014/main" id="{F2FA5282-6E2E-F77C-A7DA-935E9E366572}"/>
+                <a16:creationId xmlns:a16="http://schemas.microsoft.com/office/drawing/2014/main" id="{EA06F142-E4EB-535E-D03C-38A87C877E6D}"/>
               </a:ext>
             </a:extLst>
           </p:cNvPr>
@@ -2329,7 +2329,7 @@
           <p:cNvPr id="4" name="スライド番号プレースホルダー 3">
             <a:extLst>
               <a:ext uri="{FF2B5EF4-FFF2-40B4-BE49-F238E27FC236}">
-                <a16:creationId xmlns:a16="http://schemas.microsoft.com/office/drawing/2014/main" id="{41B1A5EA-F4EF-640D-4C3D-D3A486EDE717}"/>
+                <a16:creationId xmlns:a16="http://schemas.microsoft.com/office/drawing/2014/main" id="{7AB9EA31-6AB8-0D24-E917-7DF2F465CB55}"/>
               </a:ext>
             </a:extLst>
           </p:cNvPr>
@@ -2345,7 +2345,7 @@
           <a:bodyPr/>
           <a:lstStyle/>
           <a:p>
-            <a:fld id="{74E78F43-7BF4-49A2-96E2-D5704E76B6BA}" type="slidenum">
+            <a:fld id="{32B30BAA-96DF-405C-BB73-EF05DC564CD5}" type="slidenum">
               <a:rPr kumimoji="1" lang="ja-JP" altLang="en-US" smtClean="0"/>
               <a:t>‹#›</a:t>
             </a:fld>
@@ -2356,7 +2356,7 @@
     </p:spTree>
     <p:extLst>
       <p:ext uri="{BB962C8B-B14F-4D97-AF65-F5344CB8AC3E}">
-        <p14:creationId xmlns:p14="http://schemas.microsoft.com/office/powerpoint/2010/main" val="1371995645"/>
+        <p14:creationId xmlns:p14="http://schemas.microsoft.com/office/powerpoint/2010/main" val="308110478"/>
       </p:ext>
     </p:extLst>
   </p:cSld>
@@ -2388,7 +2388,7 @@
           <p:cNvPr id="2" name="タイトル 1">
             <a:extLst>
               <a:ext uri="{FF2B5EF4-FFF2-40B4-BE49-F238E27FC236}">
-                <a16:creationId xmlns:a16="http://schemas.microsoft.com/office/drawing/2014/main" id="{15749D5B-78BC-8CE8-3227-F025ACE28775}"/>
+                <a16:creationId xmlns:a16="http://schemas.microsoft.com/office/drawing/2014/main" id="{3E7266E0-CE36-DD41-4FFB-E8A91D30BE13}"/>
               </a:ext>
             </a:extLst>
           </p:cNvPr>
@@ -2425,7 +2425,7 @@
           <p:cNvPr id="3" name="コンテンツ プレースホルダー 2">
             <a:extLst>
               <a:ext uri="{FF2B5EF4-FFF2-40B4-BE49-F238E27FC236}">
-                <a16:creationId xmlns:a16="http://schemas.microsoft.com/office/drawing/2014/main" id="{3E13DCF1-F766-9898-61CB-294D7E987A05}"/>
+                <a16:creationId xmlns:a16="http://schemas.microsoft.com/office/drawing/2014/main" id="{1C8E10E9-CD10-C0FD-18AC-3F1354850CFE}"/>
               </a:ext>
             </a:extLst>
           </p:cNvPr>
@@ -2547,7 +2547,7 @@
           <p:cNvPr id="4" name="テキスト プレースホルダー 3">
             <a:extLst>
               <a:ext uri="{FF2B5EF4-FFF2-40B4-BE49-F238E27FC236}">
-                <a16:creationId xmlns:a16="http://schemas.microsoft.com/office/drawing/2014/main" id="{23A2866D-98AB-55AF-BB9D-AC47CA493B9B}"/>
+                <a16:creationId xmlns:a16="http://schemas.microsoft.com/office/drawing/2014/main" id="{233B8FC7-24F7-8C3F-161E-83CD65BBB576}"/>
               </a:ext>
             </a:extLst>
           </p:cNvPr>
@@ -2618,7 +2618,7 @@
           <p:cNvPr id="5" name="日付プレースホルダー 4">
             <a:extLst>
               <a:ext uri="{FF2B5EF4-FFF2-40B4-BE49-F238E27FC236}">
-                <a16:creationId xmlns:a16="http://schemas.microsoft.com/office/drawing/2014/main" id="{7BB816F7-DE6A-51AC-8C80-3657A4392A36}"/>
+                <a16:creationId xmlns:a16="http://schemas.microsoft.com/office/drawing/2014/main" id="{8BA3779B-0421-87BC-911D-52EA80D052BC}"/>
               </a:ext>
             </a:extLst>
           </p:cNvPr>
@@ -2634,7 +2634,7 @@
           <a:bodyPr/>
           <a:lstStyle/>
           <a:p>
-            <a:fld id="{57E94288-5A2C-4424-92F2-F08D9038A8E6}" type="datetimeFigureOut">
+            <a:fld id="{2F2641F0-B500-4271-B2FC-7B235583C74F}" type="datetimeFigureOut">
               <a:rPr kumimoji="1" lang="ja-JP" altLang="en-US" smtClean="0"/>
               <a:t>2026/7/30</a:t>
             </a:fld>
@@ -2647,7 +2647,7 @@
           <p:cNvPr id="6" name="フッター プレースホルダー 5">
             <a:extLst>
               <a:ext uri="{FF2B5EF4-FFF2-40B4-BE49-F238E27FC236}">
-                <a16:creationId xmlns:a16="http://schemas.microsoft.com/office/drawing/2014/main" id="{7A2D0541-4623-3877-544E-2825DD65561F}"/>
+                <a16:creationId xmlns:a16="http://schemas.microsoft.com/office/drawing/2014/main" id="{1107439E-64B4-0B00-4874-B0FD34930AE3}"/>
               </a:ext>
             </a:extLst>
           </p:cNvPr>
@@ -2672,7 +2672,7 @@
           <p:cNvPr id="7" name="スライド番号プレースホルダー 6">
             <a:extLst>
               <a:ext uri="{FF2B5EF4-FFF2-40B4-BE49-F238E27FC236}">
-                <a16:creationId xmlns:a16="http://schemas.microsoft.com/office/drawing/2014/main" id="{C1F428FB-B86B-4747-FB30-A55FE01C342C}"/>
+                <a16:creationId xmlns:a16="http://schemas.microsoft.com/office/drawing/2014/main" id="{C02F608B-8C6E-19BA-3C9C-4A37F7693BB6}"/>
               </a:ext>
             </a:extLst>
           </p:cNvPr>
@@ -2688,7 +2688,7 @@
           <a:bodyPr/>
           <a:lstStyle/>
           <a:p>
-            <a:fld id="{74E78F43-7BF4-49A2-96E2-D5704E76B6BA}" type="slidenum">
+            <a:fld id="{32B30BAA-96DF-405C-BB73-EF05DC564CD5}" type="slidenum">
               <a:rPr kumimoji="1" lang="ja-JP" altLang="en-US" smtClean="0"/>
               <a:t>‹#›</a:t>
             </a:fld>
@@ -2699,7 +2699,7 @@
     </p:spTree>
     <p:extLst>
       <p:ext uri="{BB962C8B-B14F-4D97-AF65-F5344CB8AC3E}">
-        <p14:creationId xmlns:p14="http://schemas.microsoft.com/office/powerpoint/2010/main" val="2827487070"/>
+        <p14:creationId xmlns:p14="http://schemas.microsoft.com/office/powerpoint/2010/main" val="3593627958"/>
       </p:ext>
     </p:extLst>
   </p:cSld>
@@ -2731,7 +2731,7 @@
           <p:cNvPr id="2" name="タイトル 1">
             <a:extLst>
               <a:ext uri="{FF2B5EF4-FFF2-40B4-BE49-F238E27FC236}">
-                <a16:creationId xmlns:a16="http://schemas.microsoft.com/office/drawing/2014/main" id="{64032FE9-D876-C767-854E-D5E98476764D}"/>
+                <a16:creationId xmlns:a16="http://schemas.microsoft.com/office/drawing/2014/main" id="{18073EC0-9581-93A5-A0AB-44B6E0501817}"/>
               </a:ext>
             </a:extLst>
           </p:cNvPr>
@@ -2768,7 +2768,7 @@
           <p:cNvPr id="3" name="図プレースホルダー 2">
             <a:extLst>
               <a:ext uri="{FF2B5EF4-FFF2-40B4-BE49-F238E27FC236}">
-                <a16:creationId xmlns:a16="http://schemas.microsoft.com/office/drawing/2014/main" id="{CC3FC4F3-FE51-21A7-F2A5-B29C9B8DF610}"/>
+                <a16:creationId xmlns:a16="http://schemas.microsoft.com/office/drawing/2014/main" id="{8C019564-4CFE-B85B-B269-7F3B8DDA24A1}"/>
               </a:ext>
             </a:extLst>
           </p:cNvPr>
@@ -2835,7 +2835,7 @@
           <p:cNvPr id="4" name="テキスト プレースホルダー 3">
             <a:extLst>
               <a:ext uri="{FF2B5EF4-FFF2-40B4-BE49-F238E27FC236}">
-                <a16:creationId xmlns:a16="http://schemas.microsoft.com/office/drawing/2014/main" id="{44DDDC75-BC66-75AE-9FCA-6AABCBF23FB3}"/>
+                <a16:creationId xmlns:a16="http://schemas.microsoft.com/office/drawing/2014/main" id="{452DE425-2A07-5F76-00DB-88DCBE662C7D}"/>
               </a:ext>
             </a:extLst>
           </p:cNvPr>
@@ -2906,7 +2906,7 @@
           <p:cNvPr id="5" name="日付プレースホルダー 4">
             <a:extLst>
               <a:ext uri="{FF2B5EF4-FFF2-40B4-BE49-F238E27FC236}">
-                <a16:creationId xmlns:a16="http://schemas.microsoft.com/office/drawing/2014/main" id="{26B8E201-11F7-9962-A914-0CDFD2EE7EB2}"/>
+                <a16:creationId xmlns:a16="http://schemas.microsoft.com/office/drawing/2014/main" id="{FBE807D9-3917-715F-3382-748D6A79CD4C}"/>
               </a:ext>
             </a:extLst>
           </p:cNvPr>
@@ -2922,7 +2922,7 @@
           <a:bodyPr/>
           <a:lstStyle/>
           <a:p>
-            <a:fld id="{57E94288-5A2C-4424-92F2-F08D9038A8E6}" type="datetimeFigureOut">
+            <a:fld id="{2F2641F0-B500-4271-B2FC-7B235583C74F}" type="datetimeFigureOut">
               <a:rPr kumimoji="1" lang="ja-JP" altLang="en-US" smtClean="0"/>
               <a:t>2026/7/30</a:t>
             </a:fld>
@@ -2935,7 +2935,7 @@
           <p:cNvPr id="6" name="フッター プレースホルダー 5">
             <a:extLst>
               <a:ext uri="{FF2B5EF4-FFF2-40B4-BE49-F238E27FC236}">
-                <a16:creationId xmlns:a16="http://schemas.microsoft.com/office/drawing/2014/main" id="{5DB4E173-431D-8FBD-FE28-210F555EEFA1}"/>
+                <a16:creationId xmlns:a16="http://schemas.microsoft.com/office/drawing/2014/main" id="{C9DBF398-636A-D3A4-A9DE-E9E41A058207}"/>
               </a:ext>
             </a:extLst>
           </p:cNvPr>
@@ -2960,7 +2960,7 @@
           <p:cNvPr id="7" name="スライド番号プレースホルダー 6">
             <a:extLst>
               <a:ext uri="{FF2B5EF4-FFF2-40B4-BE49-F238E27FC236}">
-                <a16:creationId xmlns:a16="http://schemas.microsoft.com/office/drawing/2014/main" id="{64AA3F0A-B345-47F0-7DBF-399A8575F9E2}"/>
+                <a16:creationId xmlns:a16="http://schemas.microsoft.com/office/drawing/2014/main" id="{3D5F0C76-B3DA-9096-61E5-67B56EFB4C98}"/>
               </a:ext>
             </a:extLst>
           </p:cNvPr>
@@ -2976,7 +2976,7 @@
           <a:bodyPr/>
           <a:lstStyle/>
           <a:p>
-            <a:fld id="{74E78F43-7BF4-49A2-96E2-D5704E76B6BA}" type="slidenum">
+            <a:fld id="{32B30BAA-96DF-405C-BB73-EF05DC564CD5}" type="slidenum">
               <a:rPr kumimoji="1" lang="ja-JP" altLang="en-US" smtClean="0"/>
               <a:t>‹#›</a:t>
             </a:fld>
@@ -2987,7 +2987,7 @@
     </p:spTree>
     <p:extLst>
       <p:ext uri="{BB962C8B-B14F-4D97-AF65-F5344CB8AC3E}">
-        <p14:creationId xmlns:p14="http://schemas.microsoft.com/office/powerpoint/2010/main" val="2175307601"/>
+        <p14:creationId xmlns:p14="http://schemas.microsoft.com/office/powerpoint/2010/main" val="1598673511"/>
       </p:ext>
     </p:extLst>
   </p:cSld>
@@ -3024,7 +3024,7 @@
           <p:cNvPr id="2" name="タイトル プレースホルダー 1">
             <a:extLst>
               <a:ext uri="{FF2B5EF4-FFF2-40B4-BE49-F238E27FC236}">
-                <a16:creationId xmlns:a16="http://schemas.microsoft.com/office/drawing/2014/main" id="{7F8EEA98-D8A5-1F1A-7F39-E5A3FA7F7150}"/>
+                <a16:creationId xmlns:a16="http://schemas.microsoft.com/office/drawing/2014/main" id="{C5B33304-7265-028F-C542-A98001B25A6B}"/>
               </a:ext>
             </a:extLst>
           </p:cNvPr>
@@ -3062,7 +3062,7 @@
           <p:cNvPr id="3" name="テキスト プレースホルダー 2">
             <a:extLst>
               <a:ext uri="{FF2B5EF4-FFF2-40B4-BE49-F238E27FC236}">
-                <a16:creationId xmlns:a16="http://schemas.microsoft.com/office/drawing/2014/main" id="{82B0DAC2-61D4-0093-D43E-AADC4C0704DB}"/>
+                <a16:creationId xmlns:a16="http://schemas.microsoft.com/office/drawing/2014/main" id="{43435C44-FF23-E78D-D646-82C31A442556}"/>
               </a:ext>
             </a:extLst>
           </p:cNvPr>
@@ -3161,7 +3161,7 @@
           <p:cNvPr id="4" name="日付プレースホルダー 3">
             <a:extLst>
               <a:ext uri="{FF2B5EF4-FFF2-40B4-BE49-F238E27FC236}">
-                <a16:creationId xmlns:a16="http://schemas.microsoft.com/office/drawing/2014/main" id="{84B3D239-191E-5CD5-419F-30F12B20435A}"/>
+                <a16:creationId xmlns:a16="http://schemas.microsoft.com/office/drawing/2014/main" id="{20B5A3F2-22C5-CD67-B915-7246E8AB92A7}"/>
               </a:ext>
             </a:extLst>
           </p:cNvPr>
@@ -3195,7 +3195,7 @@
             </a:lvl1pPr>
           </a:lstStyle>
           <a:p>
-            <a:fld id="{57E94288-5A2C-4424-92F2-F08D9038A8E6}" type="datetimeFigureOut">
+            <a:fld id="{2F2641F0-B500-4271-B2FC-7B235583C74F}" type="datetimeFigureOut">
               <a:rPr kumimoji="1" lang="ja-JP" altLang="en-US" smtClean="0"/>
               <a:t>2026/7/30</a:t>
             </a:fld>
@@ -3208,7 +3208,7 @@
           <p:cNvPr id="5" name="フッター プレースホルダー 4">
             <a:extLst>
               <a:ext uri="{FF2B5EF4-FFF2-40B4-BE49-F238E27FC236}">
-                <a16:creationId xmlns:a16="http://schemas.microsoft.com/office/drawing/2014/main" id="{D14E83E1-9744-CE3D-6B54-D55DBF02C96F}"/>
+                <a16:creationId xmlns:a16="http://schemas.microsoft.com/office/drawing/2014/main" id="{8A1CAF67-2914-CA25-BEC1-1A7E0C197108}"/>
               </a:ext>
             </a:extLst>
           </p:cNvPr>
@@ -3251,7 +3251,7 @@
           <p:cNvPr id="6" name="スライド番号プレースホルダー 5">
             <a:extLst>
               <a:ext uri="{FF2B5EF4-FFF2-40B4-BE49-F238E27FC236}">
-                <a16:creationId xmlns:a16="http://schemas.microsoft.com/office/drawing/2014/main" id="{9B573584-E955-E7F3-2DCD-6989014E1C27}"/>
+                <a16:creationId xmlns:a16="http://schemas.microsoft.com/office/drawing/2014/main" id="{6FB3CCB9-84C2-7E25-FDCF-F85CB6454AF3}"/>
               </a:ext>
             </a:extLst>
           </p:cNvPr>
@@ -3285,7 +3285,7 @@
             </a:lvl1pPr>
           </a:lstStyle>
           <a:p>
-            <a:fld id="{74E78F43-7BF4-49A2-96E2-D5704E76B6BA}" type="slidenum">
+            <a:fld id="{32B30BAA-96DF-405C-BB73-EF05DC564CD5}" type="slidenum">
               <a:rPr kumimoji="1" lang="ja-JP" altLang="en-US" smtClean="0"/>
               <a:t>‹#›</a:t>
             </a:fld>
@@ -3296,7 +3296,7 @@
     </p:spTree>
     <p:extLst>
       <p:ext uri="{BB962C8B-B14F-4D97-AF65-F5344CB8AC3E}">
-        <p14:creationId xmlns:p14="http://schemas.microsoft.com/office/powerpoint/2010/main" val="3701194228"/>
+        <p14:creationId xmlns:p14="http://schemas.microsoft.com/office/powerpoint/2010/main" val="757180116"/>
       </p:ext>
     </p:extLst>
   </p:cSld>
@@ -3619,7 +3619,7 @@
           <p:cNvPr id="2" name="テキスト ボックス 1">
             <a:extLst>
               <a:ext uri="{FF2B5EF4-FFF2-40B4-BE49-F238E27FC236}">
-                <a16:creationId xmlns:a16="http://schemas.microsoft.com/office/drawing/2014/main" id="{334081B7-1336-C7DD-2E2C-FFFBD7BC07CE}"/>
+                <a16:creationId xmlns:a16="http://schemas.microsoft.com/office/drawing/2014/main" id="{2582D590-44FA-A27F-DB42-E45D270D82F7}"/>
               </a:ext>
             </a:extLst>
           </p:cNvPr>
@@ -3665,7 +3665,7 @@
           <p:cNvPr id="3" name="テキスト ボックス 2">
             <a:extLst>
               <a:ext uri="{FF2B5EF4-FFF2-40B4-BE49-F238E27FC236}">
-                <a16:creationId xmlns:a16="http://schemas.microsoft.com/office/drawing/2014/main" id="{BC15E6EF-7E31-EBD1-B8E9-71BABB43F307}"/>
+                <a16:creationId xmlns:a16="http://schemas.microsoft.com/office/drawing/2014/main" id="{DA08229F-A17D-1A8D-2A68-CE229FD315D4}"/>
               </a:ext>
             </a:extLst>
           </p:cNvPr>
@@ -3714,7 +3714,7 @@
           <p:cNvPr id="4" name="テキスト ボックス 3">
             <a:extLst>
               <a:ext uri="{FF2B5EF4-FFF2-40B4-BE49-F238E27FC236}">
-                <a16:creationId xmlns:a16="http://schemas.microsoft.com/office/drawing/2014/main" id="{C5CFA7FA-B033-337C-58B7-187C8644B09A}"/>
+                <a16:creationId xmlns:a16="http://schemas.microsoft.com/office/drawing/2014/main" id="{2F69E4B3-0D0C-D4A1-0DB0-2E11183B011A}"/>
               </a:ext>
             </a:extLst>
           </p:cNvPr>
@@ -3754,7 +3754,7 @@
           <p:cNvPr id="5" name="テキスト ボックス 4">
             <a:extLst>
               <a:ext uri="{FF2B5EF4-FFF2-40B4-BE49-F238E27FC236}">
-                <a16:creationId xmlns:a16="http://schemas.microsoft.com/office/drawing/2014/main" id="{E849C40A-F39C-93CF-2F7D-48987FD1631D}"/>
+                <a16:creationId xmlns:a16="http://schemas.microsoft.com/office/drawing/2014/main" id="{E92C719D-3CF8-175C-AF3B-A48723E5EA74}"/>
               </a:ext>
             </a:extLst>
           </p:cNvPr>
@@ -3801,7 +3801,7 @@
             <a:hlinkClick r:id="" action="ppaction://media"/>
             <a:extLst>
               <a:ext uri="{FF2B5EF4-FFF2-40B4-BE49-F238E27FC236}">
-                <a16:creationId xmlns:a16="http://schemas.microsoft.com/office/drawing/2014/main" id="{8983E9BC-1A42-CE84-3582-D43EF72A3EB3}"/>
+                <a16:creationId xmlns:a16="http://schemas.microsoft.com/office/drawing/2014/main" id="{76EA06DF-BB62-D7A5-1F9E-A3781CC335A8}"/>
               </a:ext>
             </a:extLst>
           </p:cNvPr>
@@ -3836,7 +3836,7 @@
     </p:spTree>
     <p:extLst>
       <p:ext uri="{BB962C8B-B14F-4D97-AF65-F5344CB8AC3E}">
-        <p14:creationId xmlns:p14="http://schemas.microsoft.com/office/powerpoint/2010/main" val="398445348"/>
+        <p14:creationId xmlns:p14="http://schemas.microsoft.com/office/powerpoint/2010/main" val="2569059492"/>
       </p:ext>
     </p:extLst>
   </p:cSld>
@@ -3960,7 +3960,7 @@
           <p:cNvPr id="2" name="テキスト ボックス 1">
             <a:extLst>
               <a:ext uri="{FF2B5EF4-FFF2-40B4-BE49-F238E27FC236}">
-                <a16:creationId xmlns:a16="http://schemas.microsoft.com/office/drawing/2014/main" id="{1145B654-9768-C2EA-B180-49A71CDCCAAC}"/>
+                <a16:creationId xmlns:a16="http://schemas.microsoft.com/office/drawing/2014/main" id="{AE517F78-7F9F-D335-6E22-61D7380C8155}"/>
               </a:ext>
             </a:extLst>
           </p:cNvPr>
@@ -4006,7 +4006,7 @@
           <p:cNvPr id="3" name="テキスト ボックス 2">
             <a:extLst>
               <a:ext uri="{FF2B5EF4-FFF2-40B4-BE49-F238E27FC236}">
-                <a16:creationId xmlns:a16="http://schemas.microsoft.com/office/drawing/2014/main" id="{B4A5A3BF-FE86-F47D-7059-E525573C620C}"/>
+                <a16:creationId xmlns:a16="http://schemas.microsoft.com/office/drawing/2014/main" id="{F0AAB98F-58D6-F831-FEB2-77244B193D21}"/>
               </a:ext>
             </a:extLst>
           </p:cNvPr>
@@ -4046,7 +4046,7 @@
           <p:cNvPr id="4" name="テキスト ボックス 3">
             <a:extLst>
               <a:ext uri="{FF2B5EF4-FFF2-40B4-BE49-F238E27FC236}">
-                <a16:creationId xmlns:a16="http://schemas.microsoft.com/office/drawing/2014/main" id="{41F8021A-5DA2-C755-4C11-BF36E07A52ED}"/>
+                <a16:creationId xmlns:a16="http://schemas.microsoft.com/office/drawing/2014/main" id="{DD70B2CB-95E0-E146-32AA-AE47433AEFF0}"/>
               </a:ext>
             </a:extLst>
           </p:cNvPr>
@@ -4110,7 +4110,7 @@
           <p:cNvPr id="5" name="テキスト ボックス 4">
             <a:extLst>
               <a:ext uri="{FF2B5EF4-FFF2-40B4-BE49-F238E27FC236}">
-                <a16:creationId xmlns:a16="http://schemas.microsoft.com/office/drawing/2014/main" id="{CA545FDE-9037-210E-DFC6-4987A7810A72}"/>
+                <a16:creationId xmlns:a16="http://schemas.microsoft.com/office/drawing/2014/main" id="{DE4BFBC4-5860-CDB9-CC09-86E73DA1D37F}"/>
               </a:ext>
             </a:extLst>
           </p:cNvPr>
@@ -4157,7 +4157,7 @@
             <a:hlinkClick r:id="" action="ppaction://media"/>
             <a:extLst>
               <a:ext uri="{FF2B5EF4-FFF2-40B4-BE49-F238E27FC236}">
-                <a16:creationId xmlns:a16="http://schemas.microsoft.com/office/drawing/2014/main" id="{06BB583F-AC02-9F2B-2B43-5602C62FC5BF}"/>
+                <a16:creationId xmlns:a16="http://schemas.microsoft.com/office/drawing/2014/main" id="{7C961BE2-EB14-20F3-B081-5DAEC7ADFAA2}"/>
               </a:ext>
             </a:extLst>
           </p:cNvPr>
@@ -4192,7 +4192,7 @@
     </p:spTree>
     <p:extLst>
       <p:ext uri="{BB962C8B-B14F-4D97-AF65-F5344CB8AC3E}">
-        <p14:creationId xmlns:p14="http://schemas.microsoft.com/office/powerpoint/2010/main" val="1008287209"/>
+        <p14:creationId xmlns:p14="http://schemas.microsoft.com/office/powerpoint/2010/main" val="4229419099"/>
       </p:ext>
     </p:extLst>
   </p:cSld>
@@ -4316,7 +4316,7 @@
           <p:cNvPr id="2" name="テキスト ボックス 1">
             <a:extLst>
               <a:ext uri="{FF2B5EF4-FFF2-40B4-BE49-F238E27FC236}">
-                <a16:creationId xmlns:a16="http://schemas.microsoft.com/office/drawing/2014/main" id="{0749B02E-A435-645C-CB18-178F438B83DF}"/>
+                <a16:creationId xmlns:a16="http://schemas.microsoft.com/office/drawing/2014/main" id="{92EF2CB2-4AE1-AEB0-B82D-07E7E7C9AB32}"/>
               </a:ext>
             </a:extLst>
           </p:cNvPr>
@@ -4362,7 +4362,7 @@
           <p:cNvPr id="3" name="テキスト ボックス 2">
             <a:extLst>
               <a:ext uri="{FF2B5EF4-FFF2-40B4-BE49-F238E27FC236}">
-                <a16:creationId xmlns:a16="http://schemas.microsoft.com/office/drawing/2014/main" id="{53CE9BF3-643A-AC2F-5A8D-416C0435F04D}"/>
+                <a16:creationId xmlns:a16="http://schemas.microsoft.com/office/drawing/2014/main" id="{F50B1040-E5CC-A109-40A3-7EA5BE5071BA}"/>
               </a:ext>
             </a:extLst>
           </p:cNvPr>
@@ -4402,7 +4402,7 @@
           <p:cNvPr id="4" name="テキスト ボックス 3">
             <a:extLst>
               <a:ext uri="{FF2B5EF4-FFF2-40B4-BE49-F238E27FC236}">
-                <a16:creationId xmlns:a16="http://schemas.microsoft.com/office/drawing/2014/main" id="{8F395589-36E0-8B3B-DFA0-8D4E95065D0C}"/>
+                <a16:creationId xmlns:a16="http://schemas.microsoft.com/office/drawing/2014/main" id="{99ED40E7-7E15-9A53-AAB6-6274168F7730}"/>
               </a:ext>
             </a:extLst>
           </p:cNvPr>
@@ -4497,7 +4497,7 @@
           <p:cNvPr id="5" name="テキスト ボックス 4">
             <a:extLst>
               <a:ext uri="{FF2B5EF4-FFF2-40B4-BE49-F238E27FC236}">
-                <a16:creationId xmlns:a16="http://schemas.microsoft.com/office/drawing/2014/main" id="{72908F82-E004-8E0F-A1CC-E196D29A9B6C}"/>
+                <a16:creationId xmlns:a16="http://schemas.microsoft.com/office/drawing/2014/main" id="{761D3619-0FC8-6E3E-31A4-AF9859B924C7}"/>
               </a:ext>
             </a:extLst>
           </p:cNvPr>
@@ -4544,7 +4544,7 @@
             <a:hlinkClick r:id="" action="ppaction://media"/>
             <a:extLst>
               <a:ext uri="{FF2B5EF4-FFF2-40B4-BE49-F238E27FC236}">
-                <a16:creationId xmlns:a16="http://schemas.microsoft.com/office/drawing/2014/main" id="{5BCB0179-9E80-3DF4-FDD8-BC179AD57AD4}"/>
+                <a16:creationId xmlns:a16="http://schemas.microsoft.com/office/drawing/2014/main" id="{CB8A3317-673A-5F72-815D-D75443D0797B}"/>
               </a:ext>
             </a:extLst>
           </p:cNvPr>
@@ -4579,7 +4579,7 @@
     </p:spTree>
     <p:extLst>
       <p:ext uri="{BB962C8B-B14F-4D97-AF65-F5344CB8AC3E}">
-        <p14:creationId xmlns:p14="http://schemas.microsoft.com/office/powerpoint/2010/main" val="3586122525"/>
+        <p14:creationId xmlns:p14="http://schemas.microsoft.com/office/powerpoint/2010/main" val="464764547"/>
       </p:ext>
     </p:extLst>
   </p:cSld>
@@ -4703,7 +4703,7 @@
           <p:cNvPr id="2" name="テキスト ボックス 1">
             <a:extLst>
               <a:ext uri="{FF2B5EF4-FFF2-40B4-BE49-F238E27FC236}">
-                <a16:creationId xmlns:a16="http://schemas.microsoft.com/office/drawing/2014/main" id="{4EE80E2A-3E1C-1495-94E6-605FAD4C3AB9}"/>
+                <a16:creationId xmlns:a16="http://schemas.microsoft.com/office/drawing/2014/main" id="{36D1D584-6EA5-1BD7-59C6-C6EAEAECB0BF}"/>
               </a:ext>
             </a:extLst>
           </p:cNvPr>
@@ -4749,7 +4749,7 @@
           <p:cNvPr id="3" name="テキスト ボックス 2">
             <a:extLst>
               <a:ext uri="{FF2B5EF4-FFF2-40B4-BE49-F238E27FC236}">
-                <a16:creationId xmlns:a16="http://schemas.microsoft.com/office/drawing/2014/main" id="{3AD6E09A-2804-338C-4331-4C7116427BB1}"/>
+                <a16:creationId xmlns:a16="http://schemas.microsoft.com/office/drawing/2014/main" id="{55DA6A71-7294-3916-F785-E087659818A0}"/>
               </a:ext>
             </a:extLst>
           </p:cNvPr>
@@ -4789,7 +4789,7 @@
           <p:cNvPr id="4" name="テキスト ボックス 3">
             <a:extLst>
               <a:ext uri="{FF2B5EF4-FFF2-40B4-BE49-F238E27FC236}">
-                <a16:creationId xmlns:a16="http://schemas.microsoft.com/office/drawing/2014/main" id="{E9E5973D-120B-0C49-F62D-8D699E786C8F}"/>
+                <a16:creationId xmlns:a16="http://schemas.microsoft.com/office/drawing/2014/main" id="{7DD663D6-65B9-EAC7-6661-F7EB876C181A}"/>
               </a:ext>
             </a:extLst>
           </p:cNvPr>
@@ -4899,7 +4899,7 @@
           <p:cNvPr id="5" name="テキスト ボックス 4">
             <a:extLst>
               <a:ext uri="{FF2B5EF4-FFF2-40B4-BE49-F238E27FC236}">
-                <a16:creationId xmlns:a16="http://schemas.microsoft.com/office/drawing/2014/main" id="{84BA3DC9-EC6C-68AE-BE07-B911B233B825}"/>
+                <a16:creationId xmlns:a16="http://schemas.microsoft.com/office/drawing/2014/main" id="{5D759FBC-5DC7-00C4-C488-9F807EE20E5D}"/>
               </a:ext>
             </a:extLst>
           </p:cNvPr>
@@ -4946,7 +4946,7 @@
             <a:hlinkClick r:id="" action="ppaction://media"/>
             <a:extLst>
               <a:ext uri="{FF2B5EF4-FFF2-40B4-BE49-F238E27FC236}">
-                <a16:creationId xmlns:a16="http://schemas.microsoft.com/office/drawing/2014/main" id="{D5F403CA-B8C1-1F56-2894-E73C0DAE7D00}"/>
+                <a16:creationId xmlns:a16="http://schemas.microsoft.com/office/drawing/2014/main" id="{6C5541CB-C437-BAD8-7251-669E12B3F9C7}"/>
               </a:ext>
             </a:extLst>
           </p:cNvPr>
@@ -4981,7 +4981,7 @@
     </p:spTree>
     <p:extLst>
       <p:ext uri="{BB962C8B-B14F-4D97-AF65-F5344CB8AC3E}">
-        <p14:creationId xmlns:p14="http://schemas.microsoft.com/office/powerpoint/2010/main" val="3052822311"/>
+        <p14:creationId xmlns:p14="http://schemas.microsoft.com/office/powerpoint/2010/main" val="2891982324"/>
       </p:ext>
     </p:extLst>
   </p:cSld>
@@ -5105,7 +5105,7 @@
           <p:cNvPr id="2" name="テキスト ボックス 1">
             <a:extLst>
               <a:ext uri="{FF2B5EF4-FFF2-40B4-BE49-F238E27FC236}">
-                <a16:creationId xmlns:a16="http://schemas.microsoft.com/office/drawing/2014/main" id="{C007864E-BD3F-CF0A-1D53-8F56A5D8B940}"/>
+                <a16:creationId xmlns:a16="http://schemas.microsoft.com/office/drawing/2014/main" id="{4514AB0C-4C84-568F-729F-E631BD5D6130}"/>
               </a:ext>
             </a:extLst>
           </p:cNvPr>
@@ -5151,7 +5151,7 @@
           <p:cNvPr id="3" name="テキスト ボックス 2">
             <a:extLst>
               <a:ext uri="{FF2B5EF4-FFF2-40B4-BE49-F238E27FC236}">
-                <a16:creationId xmlns:a16="http://schemas.microsoft.com/office/drawing/2014/main" id="{DBDA559B-66C6-630F-DCAC-F364637E26F4}"/>
+                <a16:creationId xmlns:a16="http://schemas.microsoft.com/office/drawing/2014/main" id="{29AB6416-330C-C912-69D6-1414BD7D3357}"/>
               </a:ext>
             </a:extLst>
           </p:cNvPr>
@@ -5191,7 +5191,7 @@
           <p:cNvPr id="4" name="テキスト ボックス 3">
             <a:extLst>
               <a:ext uri="{FF2B5EF4-FFF2-40B4-BE49-F238E27FC236}">
-                <a16:creationId xmlns:a16="http://schemas.microsoft.com/office/drawing/2014/main" id="{D8AF85A4-019B-5593-3560-3D3974B3EB22}"/>
+                <a16:creationId xmlns:a16="http://schemas.microsoft.com/office/drawing/2014/main" id="{995E9382-3414-83A5-FEE3-8C17E6E826BD}"/>
               </a:ext>
             </a:extLst>
           </p:cNvPr>
@@ -5215,20 +5215,14 @@
           <a:lstStyle/>
           <a:p>
             <a:r>
-              <a:rPr kumimoji="1" lang="en-US" altLang="ja-JP" sz="2000">
+              <a:rPr kumimoji="1" lang="ja-JP" altLang="en-US" sz="2000">
                 <a:solidFill>
                   <a:srgbClr val="333333"/>
                 </a:solidFill>
                 <a:latin typeface="Arial" panose="020B0604020202020204" pitchFamily="34" charset="0"/>
               </a:rPr>
-              <a:t>Set confirmed custom domain</a:t>
-            </a:r>
-            <a:endParaRPr kumimoji="1" lang="ja-JP" altLang="en-US" sz="2000">
-              <a:solidFill>
-                <a:srgbClr val="333333"/>
-              </a:solidFill>
-              <a:latin typeface="Arial" panose="020B0604020202020204" pitchFamily="34" charset="0"/>
-            </a:endParaRPr>
+              <a:t>直近のコミットでは、実装の見直しと継続的な改善が行われました。</a:t>
+            </a:r>
           </a:p>
         </p:txBody>
       </p:sp>
@@ -5237,7 +5231,7 @@
           <p:cNvPr id="5" name="テキスト ボックス 4">
             <a:extLst>
               <a:ext uri="{FF2B5EF4-FFF2-40B4-BE49-F238E27FC236}">
-                <a16:creationId xmlns:a16="http://schemas.microsoft.com/office/drawing/2014/main" id="{66D0EDDC-FB14-B266-AE69-CB6D0761F097}"/>
+                <a16:creationId xmlns:a16="http://schemas.microsoft.com/office/drawing/2014/main" id="{75EE43F9-81B1-64CE-CCB9-C7CDC6F7FF58}"/>
               </a:ext>
             </a:extLst>
           </p:cNvPr>
@@ -5284,7 +5278,7 @@
             <a:hlinkClick r:id="" action="ppaction://media"/>
             <a:extLst>
               <a:ext uri="{FF2B5EF4-FFF2-40B4-BE49-F238E27FC236}">
-                <a16:creationId xmlns:a16="http://schemas.microsoft.com/office/drawing/2014/main" id="{975D9B42-B62C-3C50-1EE7-3FC7A2B670E0}"/>
+                <a16:creationId xmlns:a16="http://schemas.microsoft.com/office/drawing/2014/main" id="{F83C56C9-5BBF-ACF1-67D0-E63DB7B0B4AA}"/>
               </a:ext>
             </a:extLst>
           </p:cNvPr>
@@ -5319,7 +5313,7 @@
     </p:spTree>
     <p:extLst>
       <p:ext uri="{BB962C8B-B14F-4D97-AF65-F5344CB8AC3E}">
-        <p14:creationId xmlns:p14="http://schemas.microsoft.com/office/powerpoint/2010/main" val="1651573658"/>
+        <p14:creationId xmlns:p14="http://schemas.microsoft.com/office/powerpoint/2010/main" val="2207613574"/>
       </p:ext>
     </p:extLst>
   </p:cSld>
@@ -5362,7 +5356,7 @@
                                   <p:childTnLst>
                                     <p:cmd type="call" cmd="playFrom(0.0)">
                                       <p:cBhvr>
-                                        <p:cTn id="6" dur="6451" fill="hold"/>
+                                        <p:cTn id="6" dur="6076" fill="hold"/>
                                         <p:tgtEl>
                                           <p:spTgt spid="6"/>
                                         </p:tgtEl>
@@ -5443,7 +5437,7 @@
           <p:cNvPr id="2" name="テキスト ボックス 1">
             <a:extLst>
               <a:ext uri="{FF2B5EF4-FFF2-40B4-BE49-F238E27FC236}">
-                <a16:creationId xmlns:a16="http://schemas.microsoft.com/office/drawing/2014/main" id="{8A758D44-3E14-D366-EBB6-0F342FFD48BE}"/>
+                <a16:creationId xmlns:a16="http://schemas.microsoft.com/office/drawing/2014/main" id="{C28A2C5F-B4F4-3941-1E0E-0119821D64CF}"/>
               </a:ext>
             </a:extLst>
           </p:cNvPr>
@@ -5489,7 +5483,7 @@
           <p:cNvPr id="3" name="テキスト ボックス 2">
             <a:extLst>
               <a:ext uri="{FF2B5EF4-FFF2-40B4-BE49-F238E27FC236}">
-                <a16:creationId xmlns:a16="http://schemas.microsoft.com/office/drawing/2014/main" id="{67CE5103-1B1A-DA36-8C26-A77A00C36572}"/>
+                <a16:creationId xmlns:a16="http://schemas.microsoft.com/office/drawing/2014/main" id="{95772551-C222-3304-97D0-AA4924D47C8F}"/>
               </a:ext>
             </a:extLst>
           </p:cNvPr>
@@ -5529,7 +5523,7 @@
           <p:cNvPr id="4" name="テキスト ボックス 3">
             <a:extLst>
               <a:ext uri="{FF2B5EF4-FFF2-40B4-BE49-F238E27FC236}">
-                <a16:creationId xmlns:a16="http://schemas.microsoft.com/office/drawing/2014/main" id="{DDF8B554-DE3B-181E-5286-CC7A759DD7DE}"/>
+                <a16:creationId xmlns:a16="http://schemas.microsoft.com/office/drawing/2014/main" id="{77DB1CE7-48F3-7657-06A2-8064A0C30241}"/>
               </a:ext>
             </a:extLst>
           </p:cNvPr>
@@ -5594,7 +5588,7 @@
           <p:cNvPr id="5" name="テキスト ボックス 4">
             <a:extLst>
               <a:ext uri="{FF2B5EF4-FFF2-40B4-BE49-F238E27FC236}">
-                <a16:creationId xmlns:a16="http://schemas.microsoft.com/office/drawing/2014/main" id="{426817A7-BF66-13B4-413D-BF5706B32FC5}"/>
+                <a16:creationId xmlns:a16="http://schemas.microsoft.com/office/drawing/2014/main" id="{6237A07A-FD09-DC52-3229-8CE97E54C712}"/>
               </a:ext>
             </a:extLst>
           </p:cNvPr>
@@ -5641,7 +5635,7 @@
             <a:hlinkClick r:id="" action="ppaction://media"/>
             <a:extLst>
               <a:ext uri="{FF2B5EF4-FFF2-40B4-BE49-F238E27FC236}">
-                <a16:creationId xmlns:a16="http://schemas.microsoft.com/office/drawing/2014/main" id="{FCAA87B7-E4C7-701C-307F-D0FC2437E903}"/>
+                <a16:creationId xmlns:a16="http://schemas.microsoft.com/office/drawing/2014/main" id="{F8D0783F-7D1E-27FC-C0AE-9279C03A0ABB}"/>
               </a:ext>
             </a:extLst>
           </p:cNvPr>
@@ -5676,7 +5670,7 @@
     </p:spTree>
     <p:extLst>
       <p:ext uri="{BB962C8B-B14F-4D97-AF65-F5344CB8AC3E}">
-        <p14:creationId xmlns:p14="http://schemas.microsoft.com/office/powerpoint/2010/main" val="767055313"/>
+        <p14:creationId xmlns:p14="http://schemas.microsoft.com/office/powerpoint/2010/main" val="1733794411"/>
       </p:ext>
     </p:extLst>
   </p:cSld>
